--- a/HW/HW_3_zg2567/Image/NoICA/Task 1/pic.pptx
+++ b/HW/HW_3_zg2567/Image/NoICA/Task 1/pic.pptx
@@ -6,8 +6,8 @@
   </p:sldMasterIdLst>
   <p:sldIdLst>
     <p:sldId id="257" r:id="rId3"/>
-    <p:sldId id="258" r:id="rId4"/>
-    <p:sldId id="259" r:id="rId5"/>
+    <p:sldId id="259" r:id="rId4"/>
+    <p:sldId id="260" r:id="rId5"/>
   </p:sldIdLst>
   <p:sldSz cx="12192000" cy="6858000"/>
   <p:notesSz cx="6858000" cy="9144000"/>
@@ -109,7 +109,7 @@
   <p:extLst>
     <p:ext uri="{EFAFB233-063F-42B5-8137-9DF3F51BA10A}">
       <p15:sldGuideLst xmlns:p15="http://schemas.microsoft.com/office/powerpoint/2012/main">
-        <p15:guide id="1" orient="horz" pos="2159" userDrawn="1">
+        <p15:guide id="1" orient="horz" pos="2191" userDrawn="1">
           <p15:clr>
             <a:srgbClr val="A4A3A4"/>
           </p15:clr>
@@ -3004,76 +3004,6 @@
       <p:grpSpPr/>
       <p:pic>
         <p:nvPicPr>
-          <p:cNvPr id="7" name="图片 6"/>
-          <p:cNvPicPr>
-            <a:picLocks noChangeAspect="1"/>
-          </p:cNvPicPr>
-          <p:nvPr/>
-        </p:nvPicPr>
-        <p:blipFill>
-          <a:blip r:embed="rId1">
-            <a:alphaModFix amt="73000"/>
-          </a:blip>
-          <a:stretch>
-            <a:fillRect/>
-          </a:stretch>
-        </p:blipFill>
-        <p:spPr>
-          <a:xfrm>
-            <a:off x="2618740" y="448945"/>
-            <a:ext cx="6054725" cy="5340985"/>
-          </a:xfrm>
-          <a:prstGeom prst="rect">
-            <a:avLst/>
-          </a:prstGeom>
-        </p:spPr>
-      </p:pic>
-      <p:pic>
-        <p:nvPicPr>
-          <p:cNvPr id="5" name="图片 4"/>
-          <p:cNvPicPr>
-            <a:picLocks noChangeAspect="1"/>
-          </p:cNvPicPr>
-          <p:nvPr/>
-        </p:nvPicPr>
-        <p:blipFill>
-          <a:blip r:embed="rId2">
-            <a:alphaModFix amt="38000"/>
-          </a:blip>
-          <a:stretch>
-            <a:fillRect/>
-          </a:stretch>
-        </p:blipFill>
-        <p:spPr>
-          <a:xfrm>
-            <a:off x="2619375" y="1689100"/>
-            <a:ext cx="7684135" cy="4323080"/>
-          </a:xfrm>
-          <a:prstGeom prst="rect">
-            <a:avLst/>
-          </a:prstGeom>
-        </p:spPr>
-      </p:pic>
-    </p:spTree>
-  </p:cSld>
-  <p:clrMapOvr>
-    <a:masterClrMapping/>
-  </p:clrMapOvr>
-</p:sld>
-</file>
-
-<file path=ppt/slides/slide3.xml><?xml version="1.0" encoding="utf-8"?>
-<p:sld xmlns:a="http://schemas.openxmlformats.org/drawingml/2006/main" xmlns:r="http://schemas.openxmlformats.org/officeDocument/2006/relationships" xmlns:p="http://schemas.openxmlformats.org/presentationml/2006/main">
-  <p:cSld>
-    <p:spTree>
-      <p:nvGrpSpPr>
-        <p:cNvPr id="1" name=""/>
-        <p:cNvGrpSpPr/>
-        <p:nvPr/>
-      </p:nvGrpSpPr>
-      <p:grpSpPr/>
-      <p:pic>
-        <p:nvPicPr>
           <p:cNvPr id="4" name="图片 3" descr="diff_attention"/>
           <p:cNvPicPr>
             <a:picLocks noChangeAspect="1"/>
@@ -3125,6 +3055,74 @@
           <a:ln>
             <a:noFill/>
           </a:ln>
+        </p:spPr>
+      </p:pic>
+    </p:spTree>
+  </p:cSld>
+  <p:clrMapOvr>
+    <a:masterClrMapping/>
+  </p:clrMapOvr>
+</p:sld>
+</file>
+
+<file path=ppt/slides/slide3.xml><?xml version="1.0" encoding="utf-8"?>
+<p:sld xmlns:a="http://schemas.openxmlformats.org/drawingml/2006/main" xmlns:r="http://schemas.openxmlformats.org/officeDocument/2006/relationships" xmlns:p="http://schemas.openxmlformats.org/presentationml/2006/main">
+  <p:cSld>
+    <p:spTree>
+      <p:nvGrpSpPr>
+        <p:cNvPr id="1" name=""/>
+        <p:cNvGrpSpPr/>
+        <p:nvPr/>
+      </p:nvGrpSpPr>
+      <p:grpSpPr/>
+      <p:pic>
+        <p:nvPicPr>
+          <p:cNvPr id="2" name="图片 1" descr="untitled1"/>
+          <p:cNvPicPr>
+            <a:picLocks noChangeAspect="1"/>
+          </p:cNvPicPr>
+          <p:nvPr/>
+        </p:nvPicPr>
+        <p:blipFill>
+          <a:blip r:embed="rId1"/>
+          <a:stretch>
+            <a:fillRect/>
+          </a:stretch>
+        </p:blipFill>
+        <p:spPr>
+          <a:xfrm>
+            <a:off x="3850005" y="1758315"/>
+            <a:ext cx="6178550" cy="3441700"/>
+          </a:xfrm>
+          <a:prstGeom prst="rect">
+            <a:avLst/>
+          </a:prstGeom>
+        </p:spPr>
+      </p:pic>
+      <p:pic>
+        <p:nvPicPr>
+          <p:cNvPr id="5" name="图片 4"/>
+          <p:cNvPicPr>
+            <a:picLocks noChangeAspect="1"/>
+          </p:cNvPicPr>
+          <p:nvPr/>
+        </p:nvPicPr>
+        <p:blipFill>
+          <a:blip r:embed="rId2">
+            <a:alphaModFix amt="38000"/>
+          </a:blip>
+          <a:stretch>
+            <a:fillRect/>
+          </a:stretch>
+        </p:blipFill>
+        <p:spPr>
+          <a:xfrm>
+            <a:off x="3519170" y="1758315"/>
+            <a:ext cx="7684135" cy="4323080"/>
+          </a:xfrm>
+          <a:prstGeom prst="rect">
+            <a:avLst/>
+          </a:prstGeom>
         </p:spPr>
       </p:pic>
     </p:spTree>
